--- a/PPTs/L3-Exercises.pptx
+++ b/PPTs/L3-Exercises.pptx
@@ -177,6 +177,35 @@
 </p:presentation>
 </file>
 
+<file path=ppt/changesInfos/changesInfo1.xml><?xml version="1.0" encoding="utf-8"?>
+<pc:chgInfo xmlns:a="http://schemas.openxmlformats.org/drawingml/2006/main" xmlns:r="http://schemas.openxmlformats.org/officeDocument/2006/relationships" xmlns:ac="http://schemas.microsoft.com/office/drawing/2013/main/command" xmlns:pc="http://schemas.microsoft.com/office/powerpoint/2013/main/command">
+  <pc:docChgLst>
+    <pc:chgData name="Zonghua Gu" userId="9a7e1853e1951ef5" providerId="LiveId" clId="{CF1FAA12-072C-4ED5-BA76-0FFFAEFDB88A}"/>
+    <pc:docChg chg="undo custSel modSld">
+      <pc:chgData name="Zonghua Gu" userId="9a7e1853e1951ef5" providerId="LiveId" clId="{CF1FAA12-072C-4ED5-BA76-0FFFAEFDB88A}" dt="2025-09-19T04:07:36.498" v="7" actId="20577"/>
+      <pc:docMkLst>
+        <pc:docMk/>
+      </pc:docMkLst>
+      <pc:sldChg chg="modSp mod">
+        <pc:chgData name="Zonghua Gu" userId="9a7e1853e1951ef5" providerId="LiveId" clId="{CF1FAA12-072C-4ED5-BA76-0FFFAEFDB88A}" dt="2025-09-19T04:07:36.498" v="7" actId="20577"/>
+        <pc:sldMkLst>
+          <pc:docMk/>
+          <pc:sldMk cId="2751476572" sldId="1398"/>
+        </pc:sldMkLst>
+        <pc:spChg chg="mod">
+          <ac:chgData name="Zonghua Gu" userId="9a7e1853e1951ef5" providerId="LiveId" clId="{CF1FAA12-072C-4ED5-BA76-0FFFAEFDB88A}" dt="2025-09-19T04:07:36.498" v="7" actId="20577"/>
+          <ac:spMkLst>
+            <pc:docMk/>
+            <pc:sldMk cId="2751476572" sldId="1398"/>
+            <ac:spMk id="3" creationId="{F457968C-088E-2EEC-6B87-D73D14EA4986}"/>
+          </ac:spMkLst>
+        </pc:spChg>
+      </pc:sldChg>
+    </pc:docChg>
+  </pc:docChgLst>
+</pc:chgInfo>
+</file>
+
 <file path=ppt/handoutMasters/handoutMaster1.xml><?xml version="1.0" encoding="utf-8"?>
 <p:handoutMaster xmlns:a="http://schemas.openxmlformats.org/drawingml/2006/main" xmlns:r="http://schemas.openxmlformats.org/officeDocument/2006/relationships" xmlns:p="http://schemas.openxmlformats.org/presentationml/2006/main">
   <p:cSld>
@@ -225,14 +254,14 @@
           <a:effectLst/>
           <a:extLst>
             <a:ext uri="{909E8E84-426E-40dd-AFC4-6F175D3DCCD1}">
-              <a14:hiddenFill xmlns:a14="http://schemas.microsoft.com/office/drawing/2010/main" xmlns="">
+              <a14:hiddenFill xmlns="" xmlns:a14="http://schemas.microsoft.com/office/drawing/2010/main">
                 <a:solidFill>
                   <a:schemeClr val="bg1"/>
                 </a:solidFill>
               </a14:hiddenFill>
             </a:ext>
             <a:ext uri="{91240B29-F687-4f45-9708-019B960494DF}">
-              <a14:hiddenLine xmlns:a14="http://schemas.microsoft.com/office/drawing/2010/main" xmlns="" w="12700">
+              <a14:hiddenLine xmlns="" xmlns:a14="http://schemas.microsoft.com/office/drawing/2010/main" w="12700">
                 <a:pattFill prst="narHorz">
                   <a:fgClr>
                     <a:schemeClr val="tx1"/>
@@ -247,7 +276,7 @@
               </a14:hiddenLine>
             </a:ext>
             <a:ext uri="{AF507438-7753-43e0-B8FC-AC1667EBCBE1}">
-              <a14:hiddenEffects xmlns:a14="http://schemas.microsoft.com/office/drawing/2010/main" xmlns="">
+              <a14:hiddenEffects xmlns="" xmlns:a14="http://schemas.microsoft.com/office/drawing/2010/main">
                 <a:effectLst>
                   <a:outerShdw dist="35921" dir="2700000" algn="ctr" rotWithShape="0">
                     <a:schemeClr val="bg2"/>
@@ -353,14 +382,14 @@
           <a:effectLst/>
           <a:extLst>
             <a:ext uri="{909E8E84-426E-40dd-AFC4-6F175D3DCCD1}">
-              <a14:hiddenFill xmlns:a14="http://schemas.microsoft.com/office/drawing/2010/main" xmlns="">
+              <a14:hiddenFill xmlns="" xmlns:a14="http://schemas.microsoft.com/office/drawing/2010/main">
                 <a:solidFill>
                   <a:schemeClr val="bg1"/>
                 </a:solidFill>
               </a14:hiddenFill>
             </a:ext>
             <a:ext uri="{91240B29-F687-4f45-9708-019B960494DF}">
-              <a14:hiddenLine xmlns:a14="http://schemas.microsoft.com/office/drawing/2010/main" xmlns="" w="12700">
+              <a14:hiddenLine xmlns="" xmlns:a14="http://schemas.microsoft.com/office/drawing/2010/main" w="12700">
                 <a:pattFill prst="narHorz">
                   <a:fgClr>
                     <a:schemeClr val="tx1"/>
@@ -375,7 +404,7 @@
               </a14:hiddenLine>
             </a:ext>
             <a:ext uri="{AF507438-7753-43e0-B8FC-AC1667EBCBE1}">
-              <a14:hiddenEffects xmlns:a14="http://schemas.microsoft.com/office/drawing/2010/main" xmlns="">
+              <a14:hiddenEffects xmlns="" xmlns:a14="http://schemas.microsoft.com/office/drawing/2010/main">
                 <a:effectLst>
                   <a:outerShdw dist="35921" dir="2700000" algn="ctr" rotWithShape="0">
                     <a:schemeClr val="bg2"/>
@@ -443,17 +472,17 @@
           <a:effectLst/>
           <a:extLst>
             <a:ext uri="{FAA26D3D-D897-4be2-8F04-BA451C77F1D7}">
-              <ma14:placeholderFlag xmlns:ma14="http://schemas.microsoft.com/office/mac/drawingml/2011/main" xmlns="" val="1"/>
+              <ma14:placeholderFlag xmlns="" xmlns:ma14="http://schemas.microsoft.com/office/mac/drawingml/2011/main" val="1"/>
             </a:ext>
             <a:ext uri="{909E8E84-426E-40dd-AFC4-6F175D3DCCD1}">
-              <a14:hiddenFill xmlns:a14="http://schemas.microsoft.com/office/drawing/2010/main" xmlns="">
+              <a14:hiddenFill xmlns="" xmlns:a14="http://schemas.microsoft.com/office/drawing/2010/main">
                 <a:solidFill>
                   <a:srgbClr val="FFFFFF"/>
                 </a:solidFill>
               </a14:hiddenFill>
             </a:ext>
             <a:ext uri="{AF507438-7753-43e0-B8FC-AC1667EBCBE1}">
-              <a14:hiddenEffects xmlns:a14="http://schemas.microsoft.com/office/drawing/2010/main" xmlns="">
+              <a14:hiddenEffects xmlns="" xmlns:a14="http://schemas.microsoft.com/office/drawing/2010/main">
                 <a:effectLst>
                   <a:outerShdw blurRad="63500" dist="38099" dir="2700000" algn="ctr" rotWithShape="0">
                     <a:srgbClr val="000000">
@@ -464,7 +493,7 @@
               </a14:hiddenEffects>
             </a:ext>
             <a:ext uri="{53640926-AAD7-44d8-BBD7-CCE9431645EC}">
-              <a14:shadowObscured xmlns:a14="http://schemas.microsoft.com/office/drawing/2010/main" xmlns="" val="1"/>
+              <a14:shadowObscured xmlns="" xmlns:a14="http://schemas.microsoft.com/office/drawing/2010/main" val="1"/>
             </a:ext>
           </a:extLst>
         </p:spPr>
@@ -494,14 +523,14 @@
           <a:effectLst/>
           <a:extLst>
             <a:ext uri="{909E8E84-426E-40dd-AFC4-6F175D3DCCD1}">
-              <a14:hiddenFill xmlns:a14="http://schemas.microsoft.com/office/drawing/2010/main" xmlns="">
+              <a14:hiddenFill xmlns="" xmlns:a14="http://schemas.microsoft.com/office/drawing/2010/main">
                 <a:solidFill>
                   <a:schemeClr val="bg1"/>
                 </a:solidFill>
               </a14:hiddenFill>
             </a:ext>
             <a:ext uri="{91240B29-F687-4f45-9708-019B960494DF}">
-              <a14:hiddenLine xmlns:a14="http://schemas.microsoft.com/office/drawing/2010/main" xmlns="" w="12700">
+              <a14:hiddenLine xmlns="" xmlns:a14="http://schemas.microsoft.com/office/drawing/2010/main" w="12700">
                 <a:pattFill prst="narHorz">
                   <a:fgClr>
                     <a:schemeClr val="tx1"/>
@@ -516,7 +545,7 @@
               </a14:hiddenLine>
             </a:ext>
             <a:ext uri="{AF507438-7753-43e0-B8FC-AC1667EBCBE1}">
-              <a14:hiddenEffects xmlns:a14="http://schemas.microsoft.com/office/drawing/2010/main" xmlns="">
+              <a14:hiddenEffects xmlns="" xmlns:a14="http://schemas.microsoft.com/office/drawing/2010/main">
                 <a:effectLst>
                   <a:outerShdw dist="35921" dir="2700000" algn="ctr" rotWithShape="0">
                     <a:schemeClr val="bg2"/>
@@ -766,10 +795,10 @@
         <p:spPr>
           <a:extLst>
             <a:ext uri="{FAA26D3D-D897-4be2-8F04-BA451C77F1D7}">
-              <ma14:placeholderFlag xmlns:ma14="http://schemas.microsoft.com/office/mac/drawingml/2011/main" xmlns="" val="1"/>
+              <ma14:placeholderFlag xmlns="" xmlns:ma14="http://schemas.microsoft.com/office/mac/drawingml/2011/main" val="1"/>
             </a:ext>
             <a:ext uri="{AF507438-7753-43e0-B8FC-AC1667EBCBE1}">
-              <a14:hiddenEffects xmlns:a14="http://schemas.microsoft.com/office/drawing/2010/main" xmlns="">
+              <a14:hiddenEffects xmlns="" xmlns:a14="http://schemas.microsoft.com/office/drawing/2010/main">
                 <a:effectLst>
                   <a:outerShdw blurRad="63500" dist="38099" dir="2700000" algn="ctr" rotWithShape="0">
                     <a:schemeClr val="bg2">
@@ -5606,17 +5635,17 @@
           <a:effectLst/>
           <a:extLst>
             <a:ext uri="{FAA26D3D-D897-4be2-8F04-BA451C77F1D7}">
-              <ma14:placeholderFlag xmlns:ma14="http://schemas.microsoft.com/office/mac/drawingml/2011/main" xmlns="" val="1"/>
+              <ma14:placeholderFlag xmlns="" xmlns:ma14="http://schemas.microsoft.com/office/mac/drawingml/2011/main" val="1"/>
             </a:ext>
             <a:ext uri="{909E8E84-426E-40dd-AFC4-6F175D3DCCD1}">
-              <a14:hiddenFill xmlns:a14="http://schemas.microsoft.com/office/drawing/2010/main" xmlns="">
+              <a14:hiddenFill xmlns="" xmlns:a14="http://schemas.microsoft.com/office/drawing/2010/main">
                 <a:solidFill>
                   <a:schemeClr val="bg1"/>
                 </a:solidFill>
               </a14:hiddenFill>
             </a:ext>
             <a:ext uri="{91240B29-F687-4f45-9708-019B960494DF}">
-              <a14:hiddenLine xmlns:a14="http://schemas.microsoft.com/office/drawing/2010/main" xmlns="" w="12700">
+              <a14:hiddenLine xmlns="" xmlns:a14="http://schemas.microsoft.com/office/drawing/2010/main" w="12700">
                 <a:pattFill prst="narHorz">
                   <a:fgClr>
                     <a:schemeClr val="tx1"/>
@@ -5631,7 +5660,7 @@
               </a14:hiddenLine>
             </a:ext>
             <a:ext uri="{AF507438-7753-43e0-B8FC-AC1667EBCBE1}">
-              <a14:hiddenEffects xmlns:a14="http://schemas.microsoft.com/office/drawing/2010/main" xmlns="">
+              <a14:hiddenEffects xmlns="" xmlns:a14="http://schemas.microsoft.com/office/drawing/2010/main">
                 <a:effectLst>
                   <a:outerShdw blurRad="63500" dist="38099" dir="2700000" algn="ctr" rotWithShape="0">
                     <a:schemeClr val="bg2">
@@ -5684,17 +5713,17 @@
           <a:effectLst/>
           <a:extLst>
             <a:ext uri="{FAA26D3D-D897-4be2-8F04-BA451C77F1D7}">
-              <ma14:placeholderFlag xmlns:ma14="http://schemas.microsoft.com/office/mac/drawingml/2011/main" xmlns="" val="1"/>
+              <ma14:placeholderFlag xmlns="" xmlns:ma14="http://schemas.microsoft.com/office/mac/drawingml/2011/main" val="1"/>
             </a:ext>
             <a:ext uri="{909E8E84-426E-40dd-AFC4-6F175D3DCCD1}">
-              <a14:hiddenFill xmlns:a14="http://schemas.microsoft.com/office/drawing/2010/main" xmlns="">
+              <a14:hiddenFill xmlns="" xmlns:a14="http://schemas.microsoft.com/office/drawing/2010/main">
                 <a:solidFill>
                   <a:schemeClr val="bg1"/>
                 </a:solidFill>
               </a14:hiddenFill>
             </a:ext>
             <a:ext uri="{91240B29-F687-4f45-9708-019B960494DF}">
-              <a14:hiddenLine xmlns:a14="http://schemas.microsoft.com/office/drawing/2010/main" xmlns="" w="12700">
+              <a14:hiddenLine xmlns="" xmlns:a14="http://schemas.microsoft.com/office/drawing/2010/main" w="12700">
                 <a:pattFill prst="narHorz">
                   <a:fgClr>
                     <a:schemeClr val="tx1"/>
@@ -5709,7 +5738,7 @@
               </a14:hiddenLine>
             </a:ext>
             <a:ext uri="{AF507438-7753-43e0-B8FC-AC1667EBCBE1}">
-              <a14:hiddenEffects xmlns:a14="http://schemas.microsoft.com/office/drawing/2010/main" xmlns="">
+              <a14:hiddenEffects xmlns="" xmlns:a14="http://schemas.microsoft.com/office/drawing/2010/main">
                 <a:effectLst>
                   <a:outerShdw blurRad="63500" dist="38099" dir="2700000" algn="ctr" rotWithShape="0">
                     <a:schemeClr val="bg2">
@@ -5793,12 +5822,12 @@
           <a:effectLst/>
           <a:extLst>
             <a:ext uri="{909E8E84-426E-40dd-AFC4-6F175D3DCCD1}">
-              <a14:hiddenFill xmlns:a14="http://schemas.microsoft.com/office/drawing/2010/main" xmlns="">
+              <a14:hiddenFill xmlns="" xmlns:a14="http://schemas.microsoft.com/office/drawing/2010/main">
                 <a:noFill/>
               </a14:hiddenFill>
             </a:ext>
             <a:ext uri="{AF507438-7753-43e0-B8FC-AC1667EBCBE1}">
-              <a14:hiddenEffects xmlns:a14="http://schemas.microsoft.com/office/drawing/2010/main" xmlns="">
+              <a14:hiddenEffects xmlns="" xmlns:a14="http://schemas.microsoft.com/office/drawing/2010/main">
                 <a:effectLst>
                   <a:outerShdw blurRad="63500" dist="38099" dir="2700000" algn="ctr" rotWithShape="0">
                     <a:schemeClr val="bg2">
@@ -9162,17 +9191,17 @@
           <a:effectLst/>
           <a:extLst>
             <a:ext uri="{FAA26D3D-D897-4be2-8F04-BA451C77F1D7}">
-              <ma14:placeholderFlag xmlns:ma14="http://schemas.microsoft.com/office/mac/drawingml/2011/main" xmlns="" val="1"/>
+              <ma14:placeholderFlag xmlns="" xmlns:ma14="http://schemas.microsoft.com/office/mac/drawingml/2011/main" val="1"/>
             </a:ext>
             <a:ext uri="{909E8E84-426E-40dd-AFC4-6F175D3DCCD1}">
-              <a14:hiddenFill xmlns:a14="http://schemas.microsoft.com/office/drawing/2010/main" xmlns="">
+              <a14:hiddenFill xmlns="" xmlns:a14="http://schemas.microsoft.com/office/drawing/2010/main">
                 <a:solidFill>
                   <a:schemeClr val="bg1"/>
                 </a:solidFill>
               </a14:hiddenFill>
             </a:ext>
             <a:ext uri="{91240B29-F687-4f45-9708-019B960494DF}">
-              <a14:hiddenLine xmlns:a14="http://schemas.microsoft.com/office/drawing/2010/main" xmlns="" w="12700">
+              <a14:hiddenLine xmlns="" xmlns:a14="http://schemas.microsoft.com/office/drawing/2010/main" w="12700">
                 <a:pattFill prst="narHorz">
                   <a:fgClr>
                     <a:schemeClr val="tx1"/>
@@ -9187,7 +9216,7 @@
               </a14:hiddenLine>
             </a:ext>
             <a:ext uri="{AF507438-7753-43e0-B8FC-AC1667EBCBE1}">
-              <a14:hiddenEffects xmlns:a14="http://schemas.microsoft.com/office/drawing/2010/main" xmlns="">
+              <a14:hiddenEffects xmlns="" xmlns:a14="http://schemas.microsoft.com/office/drawing/2010/main">
                 <a:effectLst>
                   <a:outerShdw blurRad="63500" dist="38099" dir="2700000" algn="ctr" rotWithShape="0">
                     <a:schemeClr val="bg2">
@@ -12152,17 +12181,17 @@
           <a:effectLst/>
           <a:extLst>
             <a:ext uri="{FAA26D3D-D897-4be2-8F04-BA451C77F1D7}">
-              <ma14:placeholderFlag xmlns:ma14="http://schemas.microsoft.com/office/mac/drawingml/2011/main" xmlns="" val="1"/>
+              <ma14:placeholderFlag xmlns="" xmlns:ma14="http://schemas.microsoft.com/office/mac/drawingml/2011/main" val="1"/>
             </a:ext>
             <a:ext uri="{909E8E84-426E-40dd-AFC4-6F175D3DCCD1}">
-              <a14:hiddenFill xmlns:a14="http://schemas.microsoft.com/office/drawing/2010/main" xmlns="">
+              <a14:hiddenFill xmlns="" xmlns:a14="http://schemas.microsoft.com/office/drawing/2010/main">
                 <a:solidFill>
                   <a:schemeClr val="bg1"/>
                 </a:solidFill>
               </a14:hiddenFill>
             </a:ext>
             <a:ext uri="{91240B29-F687-4f45-9708-019B960494DF}">
-              <a14:hiddenLine xmlns:a14="http://schemas.microsoft.com/office/drawing/2010/main" xmlns="" w="12700">
+              <a14:hiddenLine xmlns="" xmlns:a14="http://schemas.microsoft.com/office/drawing/2010/main" w="12700">
                 <a:pattFill prst="narHorz">
                   <a:fgClr>
                     <a:schemeClr val="tx1"/>
@@ -12177,7 +12206,7 @@
               </a14:hiddenLine>
             </a:ext>
             <a:ext uri="{AF507438-7753-43e0-B8FC-AC1667EBCBE1}">
-              <a14:hiddenEffects xmlns:a14="http://schemas.microsoft.com/office/drawing/2010/main" xmlns="">
+              <a14:hiddenEffects xmlns="" xmlns:a14="http://schemas.microsoft.com/office/drawing/2010/main">
                 <a:effectLst>
                   <a:outerShdw blurRad="63500" dist="38099" dir="2700000" algn="ctr" rotWithShape="0">
                     <a:schemeClr val="bg2">
@@ -14458,17 +14487,17 @@
           <a:effectLst/>
           <a:extLst>
             <a:ext uri="{FAA26D3D-D897-4be2-8F04-BA451C77F1D7}">
-              <ma14:placeholderFlag xmlns:ma14="http://schemas.microsoft.com/office/mac/drawingml/2011/main" xmlns="" val="1"/>
+              <ma14:placeholderFlag xmlns="" xmlns:ma14="http://schemas.microsoft.com/office/mac/drawingml/2011/main" val="1"/>
             </a:ext>
             <a:ext uri="{909E8E84-426E-40dd-AFC4-6F175D3DCCD1}">
-              <a14:hiddenFill xmlns:a14="http://schemas.microsoft.com/office/drawing/2010/main" xmlns="">
+              <a14:hiddenFill xmlns="" xmlns:a14="http://schemas.microsoft.com/office/drawing/2010/main">
                 <a:solidFill>
                   <a:schemeClr val="bg1"/>
                 </a:solidFill>
               </a14:hiddenFill>
             </a:ext>
             <a:ext uri="{91240B29-F687-4f45-9708-019B960494DF}">
-              <a14:hiddenLine xmlns:a14="http://schemas.microsoft.com/office/drawing/2010/main" xmlns="" w="12700">
+              <a14:hiddenLine xmlns="" xmlns:a14="http://schemas.microsoft.com/office/drawing/2010/main" w="12700">
                 <a:pattFill prst="narHorz">
                   <a:fgClr>
                     <a:schemeClr val="tx1"/>
@@ -14483,7 +14512,7 @@
               </a14:hiddenLine>
             </a:ext>
             <a:ext uri="{AF507438-7753-43e0-B8FC-AC1667EBCBE1}">
-              <a14:hiddenEffects xmlns:a14="http://schemas.microsoft.com/office/drawing/2010/main" xmlns="">
+              <a14:hiddenEffects xmlns="" xmlns:a14="http://schemas.microsoft.com/office/drawing/2010/main">
                 <a:effectLst>
                   <a:outerShdw blurRad="63500" dist="38099" dir="2700000" algn="ctr" rotWithShape="0">
                     <a:schemeClr val="bg2">
@@ -14728,17 +14757,17 @@
           <a:effectLst/>
           <a:extLst>
             <a:ext uri="{FAA26D3D-D897-4be2-8F04-BA451C77F1D7}">
-              <ma14:placeholderFlag xmlns:ma14="http://schemas.microsoft.com/office/mac/drawingml/2011/main" xmlns="" val="1"/>
+              <ma14:placeholderFlag xmlns="" xmlns:ma14="http://schemas.microsoft.com/office/mac/drawingml/2011/main" val="1"/>
             </a:ext>
             <a:ext uri="{909E8E84-426E-40dd-AFC4-6F175D3DCCD1}">
-              <a14:hiddenFill xmlns:a14="http://schemas.microsoft.com/office/drawing/2010/main" xmlns="">
+              <a14:hiddenFill xmlns="" xmlns:a14="http://schemas.microsoft.com/office/drawing/2010/main">
                 <a:solidFill>
                   <a:schemeClr val="bg1"/>
                 </a:solidFill>
               </a14:hiddenFill>
             </a:ext>
             <a:ext uri="{91240B29-F687-4f45-9708-019B960494DF}">
-              <a14:hiddenLine xmlns:a14="http://schemas.microsoft.com/office/drawing/2010/main" xmlns="" w="12700">
+              <a14:hiddenLine xmlns="" xmlns:a14="http://schemas.microsoft.com/office/drawing/2010/main" w="12700">
                 <a:pattFill prst="narHorz">
                   <a:fgClr>
                     <a:schemeClr val="tx1"/>
@@ -14753,7 +14782,7 @@
               </a14:hiddenLine>
             </a:ext>
             <a:ext uri="{AF507438-7753-43e0-B8FC-AC1667EBCBE1}">
-              <a14:hiddenEffects xmlns:a14="http://schemas.microsoft.com/office/drawing/2010/main" xmlns="">
+              <a14:hiddenEffects xmlns="" xmlns:a14="http://schemas.microsoft.com/office/drawing/2010/main">
                 <a:effectLst>
                   <a:outerShdw blurRad="63500" dist="38099" dir="2700000" algn="ctr" rotWithShape="0">
                     <a:schemeClr val="bg2">
@@ -14998,17 +15027,17 @@
           <a:effectLst/>
           <a:extLst>
             <a:ext uri="{FAA26D3D-D897-4be2-8F04-BA451C77F1D7}">
-              <ma14:placeholderFlag xmlns:ma14="http://schemas.microsoft.com/office/mac/drawingml/2011/main" xmlns="" val="1"/>
+              <ma14:placeholderFlag xmlns="" xmlns:ma14="http://schemas.microsoft.com/office/mac/drawingml/2011/main" val="1"/>
             </a:ext>
             <a:ext uri="{909E8E84-426E-40dd-AFC4-6F175D3DCCD1}">
-              <a14:hiddenFill xmlns:a14="http://schemas.microsoft.com/office/drawing/2010/main" xmlns="">
+              <a14:hiddenFill xmlns="" xmlns:a14="http://schemas.microsoft.com/office/drawing/2010/main">
                 <a:solidFill>
                   <a:schemeClr val="bg1"/>
                 </a:solidFill>
               </a14:hiddenFill>
             </a:ext>
             <a:ext uri="{91240B29-F687-4f45-9708-019B960494DF}">
-              <a14:hiddenLine xmlns:a14="http://schemas.microsoft.com/office/drawing/2010/main" xmlns="" w="12700">
+              <a14:hiddenLine xmlns="" xmlns:a14="http://schemas.microsoft.com/office/drawing/2010/main" w="12700">
                 <a:pattFill prst="narHorz">
                   <a:fgClr>
                     <a:schemeClr val="tx1"/>
@@ -15023,7 +15052,7 @@
               </a14:hiddenLine>
             </a:ext>
             <a:ext uri="{AF507438-7753-43e0-B8FC-AC1667EBCBE1}">
-              <a14:hiddenEffects xmlns:a14="http://schemas.microsoft.com/office/drawing/2010/main" xmlns="">
+              <a14:hiddenEffects xmlns="" xmlns:a14="http://schemas.microsoft.com/office/drawing/2010/main">
                 <a:effectLst>
                   <a:outerShdw blurRad="63500" dist="38099" dir="2700000" algn="ctr" rotWithShape="0">
                     <a:schemeClr val="bg2">
@@ -30831,7 +30860,7 @@
         </p:spPr>
         <p:txBody>
           <a:bodyPr>
-            <a:normAutofit fontScale="92500" lnSpcReduction="10000"/>
+            <a:normAutofit/>
           </a:bodyPr>
           <a:lstStyle/>
           <a:p>
@@ -30842,16 +30871,13 @@
           </a:p>
           <a:p>
             <a:r>
+              <a:rPr lang="en-GB"/>
+              <a:t>Q: </a:t>
+            </a:r>
+            <a:r>
               <a:rPr lang="en-GB" dirty="0"/>
-              <a:t>Q1: What are the minimum, maximum, and all possible values of x after the two threads have completed execution?</a:t>
-            </a:r>
-          </a:p>
-          <a:p>
-            <a:r>
-              <a:rPr lang="en-GB" dirty="0"/>
-              <a:t>Q2: Suppose we protect statement ‘x = x+2’ in Thread B within a critical section using a mutex lock. What are all the minimum, maximum, and all possible final values of x? </a:t>
-            </a:r>
-            <a:endParaRPr lang="en-SE" dirty="0"/>
+              <a:t>What are the minimum, maximum, and all possible values of x after the two threads have completed execution?</a:t>
+            </a:r>
           </a:p>
         </p:txBody>
       </p:sp>
@@ -30888,17 +30914,17 @@
           <a:effectLst/>
           <a:extLst>
             <a:ext uri="{FAA26D3D-D897-4be2-8F04-BA451C77F1D7}">
-              <ma14:placeholderFlag xmlns:ma14="http://schemas.microsoft.com/office/mac/drawingml/2011/main" xmlns="" val="1"/>
+              <ma14:placeholderFlag xmlns="" xmlns:ma14="http://schemas.microsoft.com/office/mac/drawingml/2011/main" val="1"/>
             </a:ext>
             <a:ext uri="{909E8E84-426E-40dd-AFC4-6F175D3DCCD1}">
-              <a14:hiddenFill xmlns:a14="http://schemas.microsoft.com/office/drawing/2010/main" xmlns="">
+              <a14:hiddenFill xmlns="" xmlns:a14="http://schemas.microsoft.com/office/drawing/2010/main">
                 <a:solidFill>
                   <a:schemeClr val="bg1"/>
                 </a:solidFill>
               </a14:hiddenFill>
             </a:ext>
             <a:ext uri="{91240B29-F687-4f45-9708-019B960494DF}">
-              <a14:hiddenLine xmlns:a14="http://schemas.microsoft.com/office/drawing/2010/main" xmlns="" w="12700">
+              <a14:hiddenLine xmlns="" xmlns:a14="http://schemas.microsoft.com/office/drawing/2010/main" w="12700">
                 <a:pattFill prst="narHorz">
                   <a:fgClr>
                     <a:schemeClr val="tx1"/>
@@ -30913,7 +30939,7 @@
               </a14:hiddenLine>
             </a:ext>
             <a:ext uri="{AF507438-7753-43e0-B8FC-AC1667EBCBE1}">
-              <a14:hiddenEffects xmlns:a14="http://schemas.microsoft.com/office/drawing/2010/main" xmlns="">
+              <a14:hiddenEffects xmlns="" xmlns:a14="http://schemas.microsoft.com/office/drawing/2010/main">
                 <a:effectLst>
                   <a:outerShdw blurRad="63500" dist="38099" dir="2700000" algn="ctr" rotWithShape="0">
                     <a:schemeClr val="bg2">
@@ -31202,17 +31228,17 @@
           <a:effectLst/>
           <a:extLst>
             <a:ext uri="{FAA26D3D-D897-4be2-8F04-BA451C77F1D7}">
-              <ma14:placeholderFlag xmlns:ma14="http://schemas.microsoft.com/office/mac/drawingml/2011/main" xmlns="" val="1"/>
+              <ma14:placeholderFlag xmlns="" xmlns:ma14="http://schemas.microsoft.com/office/mac/drawingml/2011/main" val="1"/>
             </a:ext>
             <a:ext uri="{909E8E84-426E-40dd-AFC4-6F175D3DCCD1}">
-              <a14:hiddenFill xmlns:a14="http://schemas.microsoft.com/office/drawing/2010/main" xmlns="">
+              <a14:hiddenFill xmlns="" xmlns:a14="http://schemas.microsoft.com/office/drawing/2010/main">
                 <a:solidFill>
                   <a:schemeClr val="bg1"/>
                 </a:solidFill>
               </a14:hiddenFill>
             </a:ext>
             <a:ext uri="{91240B29-F687-4f45-9708-019B960494DF}">
-              <a14:hiddenLine xmlns:a14="http://schemas.microsoft.com/office/drawing/2010/main" xmlns="" w="12700">
+              <a14:hiddenLine xmlns="" xmlns:a14="http://schemas.microsoft.com/office/drawing/2010/main" w="12700">
                 <a:pattFill prst="narHorz">
                   <a:fgClr>
                     <a:schemeClr val="tx1"/>
@@ -31227,7 +31253,7 @@
               </a14:hiddenLine>
             </a:ext>
             <a:ext uri="{AF507438-7753-43e0-B8FC-AC1667EBCBE1}">
-              <a14:hiddenEffects xmlns:a14="http://schemas.microsoft.com/office/drawing/2010/main" xmlns="">
+              <a14:hiddenEffects xmlns="" xmlns:a14="http://schemas.microsoft.com/office/drawing/2010/main">
                 <a:effectLst>
                   <a:outerShdw blurRad="63500" dist="38099" dir="2700000" algn="ctr" rotWithShape="0">
                     <a:schemeClr val="bg2">
@@ -31528,17 +31554,17 @@
           <a:effectLst/>
           <a:extLst>
             <a:ext uri="{FAA26D3D-D897-4be2-8F04-BA451C77F1D7}">
-              <ma14:placeholderFlag xmlns:ma14="http://schemas.microsoft.com/office/mac/drawingml/2011/main" xmlns="" val="1"/>
+              <ma14:placeholderFlag xmlns="" xmlns:ma14="http://schemas.microsoft.com/office/mac/drawingml/2011/main" val="1"/>
             </a:ext>
             <a:ext uri="{909E8E84-426E-40dd-AFC4-6F175D3DCCD1}">
-              <a14:hiddenFill xmlns:a14="http://schemas.microsoft.com/office/drawing/2010/main" xmlns="">
+              <a14:hiddenFill xmlns="" xmlns:a14="http://schemas.microsoft.com/office/drawing/2010/main">
                 <a:solidFill>
                   <a:schemeClr val="bg1"/>
                 </a:solidFill>
               </a14:hiddenFill>
             </a:ext>
             <a:ext uri="{91240B29-F687-4f45-9708-019B960494DF}">
-              <a14:hiddenLine xmlns:a14="http://schemas.microsoft.com/office/drawing/2010/main" xmlns="" w="12700">
+              <a14:hiddenLine xmlns="" xmlns:a14="http://schemas.microsoft.com/office/drawing/2010/main" w="12700">
                 <a:pattFill prst="narHorz">
                   <a:fgClr>
                     <a:schemeClr val="tx1"/>
@@ -31553,7 +31579,7 @@
               </a14:hiddenLine>
             </a:ext>
             <a:ext uri="{AF507438-7753-43e0-B8FC-AC1667EBCBE1}">
-              <a14:hiddenEffects xmlns:a14="http://schemas.microsoft.com/office/drawing/2010/main" xmlns="">
+              <a14:hiddenEffects xmlns="" xmlns:a14="http://schemas.microsoft.com/office/drawing/2010/main">
                 <a:effectLst>
                   <a:outerShdw blurRad="63500" dist="38099" dir="2700000" algn="ctr" rotWithShape="0">
                     <a:schemeClr val="bg2">
@@ -31909,17 +31935,17 @@
           <a:effectLst/>
           <a:extLst>
             <a:ext uri="{FAA26D3D-D897-4be2-8F04-BA451C77F1D7}">
-              <ma14:placeholderFlag xmlns:ma14="http://schemas.microsoft.com/office/mac/drawingml/2011/main" xmlns="" val="1"/>
+              <ma14:placeholderFlag xmlns="" xmlns:ma14="http://schemas.microsoft.com/office/mac/drawingml/2011/main" val="1"/>
             </a:ext>
             <a:ext uri="{909E8E84-426E-40dd-AFC4-6F175D3DCCD1}">
-              <a14:hiddenFill xmlns:a14="http://schemas.microsoft.com/office/drawing/2010/main" xmlns="">
+              <a14:hiddenFill xmlns="" xmlns:a14="http://schemas.microsoft.com/office/drawing/2010/main">
                 <a:solidFill>
                   <a:schemeClr val="bg1"/>
                 </a:solidFill>
               </a14:hiddenFill>
             </a:ext>
             <a:ext uri="{91240B29-F687-4f45-9708-019B960494DF}">
-              <a14:hiddenLine xmlns:a14="http://schemas.microsoft.com/office/drawing/2010/main" xmlns="" w="12700">
+              <a14:hiddenLine xmlns="" xmlns:a14="http://schemas.microsoft.com/office/drawing/2010/main" w="12700">
                 <a:pattFill prst="narHorz">
                   <a:fgClr>
                     <a:schemeClr val="tx1"/>
@@ -31934,7 +31960,7 @@
               </a14:hiddenLine>
             </a:ext>
             <a:ext uri="{AF507438-7753-43e0-B8FC-AC1667EBCBE1}">
-              <a14:hiddenEffects xmlns:a14="http://schemas.microsoft.com/office/drawing/2010/main" xmlns="">
+              <a14:hiddenEffects xmlns="" xmlns:a14="http://schemas.microsoft.com/office/drawing/2010/main">
                 <a:effectLst>
                   <a:outerShdw blurRad="63500" dist="38099" dir="2700000" algn="ctr" rotWithShape="0">
                     <a:schemeClr val="bg2">
@@ -32831,17 +32857,17 @@
           <a:effectLst/>
           <a:extLst>
             <a:ext uri="{FAA26D3D-D897-4be2-8F04-BA451C77F1D7}">
-              <ma14:placeholderFlag xmlns:ma14="http://schemas.microsoft.com/office/mac/drawingml/2011/main" xmlns="" val="1"/>
+              <ma14:placeholderFlag xmlns="" xmlns:ma14="http://schemas.microsoft.com/office/mac/drawingml/2011/main" val="1"/>
             </a:ext>
             <a:ext uri="{909E8E84-426E-40dd-AFC4-6F175D3DCCD1}">
-              <a14:hiddenFill xmlns:a14="http://schemas.microsoft.com/office/drawing/2010/main" xmlns="">
+              <a14:hiddenFill xmlns="" xmlns:a14="http://schemas.microsoft.com/office/drawing/2010/main">
                 <a:solidFill>
                   <a:schemeClr val="bg1"/>
                 </a:solidFill>
               </a14:hiddenFill>
             </a:ext>
             <a:ext uri="{91240B29-F687-4f45-9708-019B960494DF}">
-              <a14:hiddenLine xmlns:a14="http://schemas.microsoft.com/office/drawing/2010/main" xmlns="" w="12700">
+              <a14:hiddenLine xmlns="" xmlns:a14="http://schemas.microsoft.com/office/drawing/2010/main" w="12700">
                 <a:pattFill prst="narHorz">
                   <a:fgClr>
                     <a:schemeClr val="tx1"/>
@@ -32856,7 +32882,7 @@
               </a14:hiddenLine>
             </a:ext>
             <a:ext uri="{AF507438-7753-43e0-B8FC-AC1667EBCBE1}">
-              <a14:hiddenEffects xmlns:a14="http://schemas.microsoft.com/office/drawing/2010/main" xmlns="">
+              <a14:hiddenEffects xmlns="" xmlns:a14="http://schemas.microsoft.com/office/drawing/2010/main">
                 <a:effectLst>
                   <a:outerShdw blurRad="63500" dist="38099" dir="2700000" algn="ctr" rotWithShape="0">
                     <a:schemeClr val="bg2">
@@ -33171,17 +33197,17 @@
           <a:effectLst/>
           <a:extLst>
             <a:ext uri="{FAA26D3D-D897-4be2-8F04-BA451C77F1D7}">
-              <ma14:placeholderFlag xmlns:ma14="http://schemas.microsoft.com/office/mac/drawingml/2011/main" xmlns="" val="1"/>
+              <ma14:placeholderFlag xmlns="" xmlns:ma14="http://schemas.microsoft.com/office/mac/drawingml/2011/main" val="1"/>
             </a:ext>
             <a:ext uri="{909E8E84-426E-40dd-AFC4-6F175D3DCCD1}">
-              <a14:hiddenFill xmlns:a14="http://schemas.microsoft.com/office/drawing/2010/main" xmlns="">
+              <a14:hiddenFill xmlns="" xmlns:a14="http://schemas.microsoft.com/office/drawing/2010/main">
                 <a:solidFill>
                   <a:schemeClr val="bg1"/>
                 </a:solidFill>
               </a14:hiddenFill>
             </a:ext>
             <a:ext uri="{91240B29-F687-4f45-9708-019B960494DF}">
-              <a14:hiddenLine xmlns:a14="http://schemas.microsoft.com/office/drawing/2010/main" xmlns="" w="12700">
+              <a14:hiddenLine xmlns="" xmlns:a14="http://schemas.microsoft.com/office/drawing/2010/main" w="12700">
                 <a:pattFill prst="narHorz">
                   <a:fgClr>
                     <a:schemeClr val="tx1"/>
@@ -33196,7 +33222,7 @@
               </a14:hiddenLine>
             </a:ext>
             <a:ext uri="{AF507438-7753-43e0-B8FC-AC1667EBCBE1}">
-              <a14:hiddenEffects xmlns:a14="http://schemas.microsoft.com/office/drawing/2010/main" xmlns="">
+              <a14:hiddenEffects xmlns="" xmlns:a14="http://schemas.microsoft.com/office/drawing/2010/main">
                 <a:effectLst>
                   <a:outerShdw blurRad="63500" dist="38099" dir="2700000" algn="ctr" rotWithShape="0">
                     <a:schemeClr val="bg2">
@@ -33520,17 +33546,17 @@
           <a:effectLst/>
           <a:extLst>
             <a:ext uri="{FAA26D3D-D897-4be2-8F04-BA451C77F1D7}">
-              <ma14:placeholderFlag xmlns:ma14="http://schemas.microsoft.com/office/mac/drawingml/2011/main" xmlns="" val="1"/>
+              <ma14:placeholderFlag xmlns="" xmlns:ma14="http://schemas.microsoft.com/office/mac/drawingml/2011/main" val="1"/>
             </a:ext>
             <a:ext uri="{909E8E84-426E-40dd-AFC4-6F175D3DCCD1}">
-              <a14:hiddenFill xmlns:a14="http://schemas.microsoft.com/office/drawing/2010/main" xmlns="">
+              <a14:hiddenFill xmlns="" xmlns:a14="http://schemas.microsoft.com/office/drawing/2010/main">
                 <a:solidFill>
                   <a:schemeClr val="bg1"/>
                 </a:solidFill>
               </a14:hiddenFill>
             </a:ext>
             <a:ext uri="{91240B29-F687-4f45-9708-019B960494DF}">
-              <a14:hiddenLine xmlns:a14="http://schemas.microsoft.com/office/drawing/2010/main" xmlns="" w="12700">
+              <a14:hiddenLine xmlns="" xmlns:a14="http://schemas.microsoft.com/office/drawing/2010/main" w="12700">
                 <a:pattFill prst="narHorz">
                   <a:fgClr>
                     <a:schemeClr val="tx1"/>
@@ -33545,7 +33571,7 @@
               </a14:hiddenLine>
             </a:ext>
             <a:ext uri="{AF507438-7753-43e0-B8FC-AC1667EBCBE1}">
-              <a14:hiddenEffects xmlns:a14="http://schemas.microsoft.com/office/drawing/2010/main" xmlns="">
+              <a14:hiddenEffects xmlns="" xmlns:a14="http://schemas.microsoft.com/office/drawing/2010/main">
                 <a:effectLst>
                   <a:outerShdw blurRad="63500" dist="38099" dir="2700000" algn="ctr" rotWithShape="0">
                     <a:schemeClr val="bg2">
@@ -33941,17 +33967,17 @@
           <a:effectLst/>
           <a:extLst>
             <a:ext uri="{FAA26D3D-D897-4be2-8F04-BA451C77F1D7}">
-              <ma14:placeholderFlag xmlns:ma14="http://schemas.microsoft.com/office/mac/drawingml/2011/main" xmlns="" val="1"/>
+              <ma14:placeholderFlag xmlns="" xmlns:ma14="http://schemas.microsoft.com/office/mac/drawingml/2011/main" val="1"/>
             </a:ext>
             <a:ext uri="{909E8E84-426E-40dd-AFC4-6F175D3DCCD1}">
-              <a14:hiddenFill xmlns:a14="http://schemas.microsoft.com/office/drawing/2010/main" xmlns="">
+              <a14:hiddenFill xmlns="" xmlns:a14="http://schemas.microsoft.com/office/drawing/2010/main">
                 <a:solidFill>
                   <a:schemeClr val="bg1"/>
                 </a:solidFill>
               </a14:hiddenFill>
             </a:ext>
             <a:ext uri="{91240B29-F687-4f45-9708-019B960494DF}">
-              <a14:hiddenLine xmlns:a14="http://schemas.microsoft.com/office/drawing/2010/main" xmlns="" w="12700">
+              <a14:hiddenLine xmlns="" xmlns:a14="http://schemas.microsoft.com/office/drawing/2010/main" w="12700">
                 <a:pattFill prst="narHorz">
                   <a:fgClr>
                     <a:schemeClr val="tx1"/>
@@ -33966,7 +33992,7 @@
               </a14:hiddenLine>
             </a:ext>
             <a:ext uri="{AF507438-7753-43e0-B8FC-AC1667EBCBE1}">
-              <a14:hiddenEffects xmlns:a14="http://schemas.microsoft.com/office/drawing/2010/main" xmlns="">
+              <a14:hiddenEffects xmlns="" xmlns:a14="http://schemas.microsoft.com/office/drawing/2010/main">
                 <a:effectLst>
                   <a:outerShdw blurRad="63500" dist="38099" dir="2700000" algn="ctr" rotWithShape="0">
                     <a:schemeClr val="bg2">
@@ -34294,17 +34320,17 @@
           <a:effectLst/>
           <a:extLst>
             <a:ext uri="{FAA26D3D-D897-4be2-8F04-BA451C77F1D7}">
-              <ma14:placeholderFlag xmlns:ma14="http://schemas.microsoft.com/office/mac/drawingml/2011/main" xmlns="" val="1"/>
+              <ma14:placeholderFlag xmlns="" xmlns:ma14="http://schemas.microsoft.com/office/mac/drawingml/2011/main" val="1"/>
             </a:ext>
             <a:ext uri="{909E8E84-426E-40dd-AFC4-6F175D3DCCD1}">
-              <a14:hiddenFill xmlns:a14="http://schemas.microsoft.com/office/drawing/2010/main" xmlns="">
+              <a14:hiddenFill xmlns="" xmlns:a14="http://schemas.microsoft.com/office/drawing/2010/main">
                 <a:solidFill>
                   <a:schemeClr val="bg1"/>
                 </a:solidFill>
               </a14:hiddenFill>
             </a:ext>
             <a:ext uri="{91240B29-F687-4f45-9708-019B960494DF}">
-              <a14:hiddenLine xmlns:a14="http://schemas.microsoft.com/office/drawing/2010/main" xmlns="" w="12700">
+              <a14:hiddenLine xmlns="" xmlns:a14="http://schemas.microsoft.com/office/drawing/2010/main" w="12700">
                 <a:pattFill prst="narHorz">
                   <a:fgClr>
                     <a:schemeClr val="tx1"/>
@@ -34319,7 +34345,7 @@
               </a14:hiddenLine>
             </a:ext>
             <a:ext uri="{AF507438-7753-43e0-B8FC-AC1667EBCBE1}">
-              <a14:hiddenEffects xmlns:a14="http://schemas.microsoft.com/office/drawing/2010/main" xmlns="">
+              <a14:hiddenEffects xmlns="" xmlns:a14="http://schemas.microsoft.com/office/drawing/2010/main">
                 <a:effectLst>
                   <a:outerShdw blurRad="63500" dist="38099" dir="2700000" algn="ctr" rotWithShape="0">
                     <a:schemeClr val="bg2">
@@ -34645,17 +34671,17 @@
           <a:effectLst/>
           <a:extLst>
             <a:ext uri="{FAA26D3D-D897-4be2-8F04-BA451C77F1D7}">
-              <ma14:placeholderFlag xmlns:ma14="http://schemas.microsoft.com/office/mac/drawingml/2011/main" xmlns="" val="1"/>
+              <ma14:placeholderFlag xmlns="" xmlns:ma14="http://schemas.microsoft.com/office/mac/drawingml/2011/main" val="1"/>
             </a:ext>
             <a:ext uri="{909E8E84-426E-40dd-AFC4-6F175D3DCCD1}">
-              <a14:hiddenFill xmlns:a14="http://schemas.microsoft.com/office/drawing/2010/main" xmlns="">
+              <a14:hiddenFill xmlns="" xmlns:a14="http://schemas.microsoft.com/office/drawing/2010/main">
                 <a:solidFill>
                   <a:schemeClr val="bg1"/>
                 </a:solidFill>
               </a14:hiddenFill>
             </a:ext>
             <a:ext uri="{91240B29-F687-4f45-9708-019B960494DF}">
-              <a14:hiddenLine xmlns:a14="http://schemas.microsoft.com/office/drawing/2010/main" xmlns="" w="12700">
+              <a14:hiddenLine xmlns="" xmlns:a14="http://schemas.microsoft.com/office/drawing/2010/main" w="12700">
                 <a:pattFill prst="narHorz">
                   <a:fgClr>
                     <a:schemeClr val="tx1"/>
@@ -34670,7 +34696,7 @@
               </a14:hiddenLine>
             </a:ext>
             <a:ext uri="{AF507438-7753-43e0-B8FC-AC1667EBCBE1}">
-              <a14:hiddenEffects xmlns:a14="http://schemas.microsoft.com/office/drawing/2010/main" xmlns="">
+              <a14:hiddenEffects xmlns="" xmlns:a14="http://schemas.microsoft.com/office/drawing/2010/main">
                 <a:effectLst>
                   <a:outerShdw blurRad="63500" dist="38099" dir="2700000" algn="ctr" rotWithShape="0">
                     <a:schemeClr val="bg2">
@@ -35003,17 +35029,17 @@
           <a:effectLst/>
           <a:extLst>
             <a:ext uri="{FAA26D3D-D897-4be2-8F04-BA451C77F1D7}">
-              <ma14:placeholderFlag xmlns:ma14="http://schemas.microsoft.com/office/mac/drawingml/2011/main" xmlns="" val="1"/>
+              <ma14:placeholderFlag xmlns="" xmlns:ma14="http://schemas.microsoft.com/office/mac/drawingml/2011/main" val="1"/>
             </a:ext>
             <a:ext uri="{909E8E84-426E-40dd-AFC4-6F175D3DCCD1}">
-              <a14:hiddenFill xmlns:a14="http://schemas.microsoft.com/office/drawing/2010/main" xmlns="">
+              <a14:hiddenFill xmlns="" xmlns:a14="http://schemas.microsoft.com/office/drawing/2010/main">
                 <a:solidFill>
                   <a:schemeClr val="bg1"/>
                 </a:solidFill>
               </a14:hiddenFill>
             </a:ext>
             <a:ext uri="{91240B29-F687-4f45-9708-019B960494DF}">
-              <a14:hiddenLine xmlns:a14="http://schemas.microsoft.com/office/drawing/2010/main" xmlns="" w="12700">
+              <a14:hiddenLine xmlns="" xmlns:a14="http://schemas.microsoft.com/office/drawing/2010/main" w="12700">
                 <a:pattFill prst="narHorz">
                   <a:fgClr>
                     <a:schemeClr val="tx1"/>
@@ -35028,7 +35054,7 @@
               </a14:hiddenLine>
             </a:ext>
             <a:ext uri="{AF507438-7753-43e0-B8FC-AC1667EBCBE1}">
-              <a14:hiddenEffects xmlns:a14="http://schemas.microsoft.com/office/drawing/2010/main" xmlns="">
+              <a14:hiddenEffects xmlns="" xmlns:a14="http://schemas.microsoft.com/office/drawing/2010/main">
                 <a:effectLst>
                   <a:outerShdw blurRad="63500" dist="38099" dir="2700000" algn="ctr" rotWithShape="0">
                     <a:schemeClr val="bg2">
@@ -35367,17 +35393,17 @@
           <a:effectLst/>
           <a:extLst>
             <a:ext uri="{FAA26D3D-D897-4be2-8F04-BA451C77F1D7}">
-              <ma14:placeholderFlag xmlns:ma14="http://schemas.microsoft.com/office/mac/drawingml/2011/main" xmlns="" val="1"/>
+              <ma14:placeholderFlag xmlns="" xmlns:ma14="http://schemas.microsoft.com/office/mac/drawingml/2011/main" val="1"/>
             </a:ext>
             <a:ext uri="{909E8E84-426E-40dd-AFC4-6F175D3DCCD1}">
-              <a14:hiddenFill xmlns:a14="http://schemas.microsoft.com/office/drawing/2010/main" xmlns="">
+              <a14:hiddenFill xmlns="" xmlns:a14="http://schemas.microsoft.com/office/drawing/2010/main">
                 <a:solidFill>
                   <a:schemeClr val="bg1"/>
                 </a:solidFill>
               </a14:hiddenFill>
             </a:ext>
             <a:ext uri="{91240B29-F687-4f45-9708-019B960494DF}">
-              <a14:hiddenLine xmlns:a14="http://schemas.microsoft.com/office/drawing/2010/main" xmlns="" w="12700">
+              <a14:hiddenLine xmlns="" xmlns:a14="http://schemas.microsoft.com/office/drawing/2010/main" w="12700">
                 <a:pattFill prst="narHorz">
                   <a:fgClr>
                     <a:schemeClr val="tx1"/>
@@ -35392,7 +35418,7 @@
               </a14:hiddenLine>
             </a:ext>
             <a:ext uri="{AF507438-7753-43e0-B8FC-AC1667EBCBE1}">
-              <a14:hiddenEffects xmlns:a14="http://schemas.microsoft.com/office/drawing/2010/main" xmlns="">
+              <a14:hiddenEffects xmlns="" xmlns:a14="http://schemas.microsoft.com/office/drawing/2010/main">
                 <a:effectLst>
                   <a:outerShdw blurRad="63500" dist="38099" dir="2700000" algn="ctr" rotWithShape="0">
                     <a:schemeClr val="bg2">
@@ -35668,17 +35694,17 @@
           <a:effectLst/>
           <a:extLst>
             <a:ext uri="{FAA26D3D-D897-4be2-8F04-BA451C77F1D7}">
-              <ma14:placeholderFlag xmlns:ma14="http://schemas.microsoft.com/office/mac/drawingml/2011/main" xmlns="" val="1"/>
+              <ma14:placeholderFlag xmlns="" xmlns:ma14="http://schemas.microsoft.com/office/mac/drawingml/2011/main" val="1"/>
             </a:ext>
             <a:ext uri="{909E8E84-426E-40dd-AFC4-6F175D3DCCD1}">
-              <a14:hiddenFill xmlns:a14="http://schemas.microsoft.com/office/drawing/2010/main" xmlns="">
+              <a14:hiddenFill xmlns="" xmlns:a14="http://schemas.microsoft.com/office/drawing/2010/main">
                 <a:solidFill>
                   <a:schemeClr val="bg1"/>
                 </a:solidFill>
               </a14:hiddenFill>
             </a:ext>
             <a:ext uri="{91240B29-F687-4f45-9708-019B960494DF}">
-              <a14:hiddenLine xmlns:a14="http://schemas.microsoft.com/office/drawing/2010/main" xmlns="" w="12700">
+              <a14:hiddenLine xmlns="" xmlns:a14="http://schemas.microsoft.com/office/drawing/2010/main" w="12700">
                 <a:pattFill prst="narHorz">
                   <a:fgClr>
                     <a:schemeClr val="tx1"/>
@@ -35693,7 +35719,7 @@
               </a14:hiddenLine>
             </a:ext>
             <a:ext uri="{AF507438-7753-43e0-B8FC-AC1667EBCBE1}">
-              <a14:hiddenEffects xmlns:a14="http://schemas.microsoft.com/office/drawing/2010/main" xmlns="">
+              <a14:hiddenEffects xmlns="" xmlns:a14="http://schemas.microsoft.com/office/drawing/2010/main">
                 <a:effectLst>
                   <a:outerShdw blurRad="63500" dist="38099" dir="2700000" algn="ctr" rotWithShape="0">
                     <a:schemeClr val="bg2">
@@ -36163,17 +36189,17 @@
           <a:effectLst/>
           <a:extLst>
             <a:ext uri="{FAA26D3D-D897-4be2-8F04-BA451C77F1D7}">
-              <ma14:placeholderFlag xmlns:ma14="http://schemas.microsoft.com/office/mac/drawingml/2011/main" xmlns="" val="1"/>
+              <ma14:placeholderFlag xmlns="" xmlns:ma14="http://schemas.microsoft.com/office/mac/drawingml/2011/main" val="1"/>
             </a:ext>
             <a:ext uri="{909E8E84-426E-40dd-AFC4-6F175D3DCCD1}">
-              <a14:hiddenFill xmlns:a14="http://schemas.microsoft.com/office/drawing/2010/main" xmlns="">
+              <a14:hiddenFill xmlns="" xmlns:a14="http://schemas.microsoft.com/office/drawing/2010/main">
                 <a:solidFill>
                   <a:schemeClr val="bg1"/>
                 </a:solidFill>
               </a14:hiddenFill>
             </a:ext>
             <a:ext uri="{91240B29-F687-4f45-9708-019B960494DF}">
-              <a14:hiddenLine xmlns:a14="http://schemas.microsoft.com/office/drawing/2010/main" xmlns="" w="12700">
+              <a14:hiddenLine xmlns="" xmlns:a14="http://schemas.microsoft.com/office/drawing/2010/main" w="12700">
                 <a:pattFill prst="narHorz">
                   <a:fgClr>
                     <a:schemeClr val="tx1"/>
@@ -36188,7 +36214,7 @@
               </a14:hiddenLine>
             </a:ext>
             <a:ext uri="{AF507438-7753-43e0-B8FC-AC1667EBCBE1}">
-              <a14:hiddenEffects xmlns:a14="http://schemas.microsoft.com/office/drawing/2010/main" xmlns="">
+              <a14:hiddenEffects xmlns="" xmlns:a14="http://schemas.microsoft.com/office/drawing/2010/main">
                 <a:effectLst>
                   <a:outerShdw blurRad="63500" dist="38099" dir="2700000" algn="ctr" rotWithShape="0">
                     <a:schemeClr val="bg2">
@@ -36527,17 +36553,17 @@
           <a:effectLst/>
           <a:extLst>
             <a:ext uri="{FAA26D3D-D897-4be2-8F04-BA451C77F1D7}">
-              <ma14:placeholderFlag xmlns:ma14="http://schemas.microsoft.com/office/mac/drawingml/2011/main" xmlns="" val="1"/>
+              <ma14:placeholderFlag xmlns="" xmlns:ma14="http://schemas.microsoft.com/office/mac/drawingml/2011/main" val="1"/>
             </a:ext>
             <a:ext uri="{909E8E84-426E-40dd-AFC4-6F175D3DCCD1}">
-              <a14:hiddenFill xmlns:a14="http://schemas.microsoft.com/office/drawing/2010/main" xmlns="">
+              <a14:hiddenFill xmlns="" xmlns:a14="http://schemas.microsoft.com/office/drawing/2010/main">
                 <a:solidFill>
                   <a:schemeClr val="bg1"/>
                 </a:solidFill>
               </a14:hiddenFill>
             </a:ext>
             <a:ext uri="{91240B29-F687-4f45-9708-019B960494DF}">
-              <a14:hiddenLine xmlns:a14="http://schemas.microsoft.com/office/drawing/2010/main" xmlns="" w="12700">
+              <a14:hiddenLine xmlns="" xmlns:a14="http://schemas.microsoft.com/office/drawing/2010/main" w="12700">
                 <a:pattFill prst="narHorz">
                   <a:fgClr>
                     <a:schemeClr val="tx1"/>
@@ -36552,7 +36578,7 @@
               </a14:hiddenLine>
             </a:ext>
             <a:ext uri="{AF507438-7753-43e0-B8FC-AC1667EBCBE1}">
-              <a14:hiddenEffects xmlns:a14="http://schemas.microsoft.com/office/drawing/2010/main" xmlns="">
+              <a14:hiddenEffects xmlns="" xmlns:a14="http://schemas.microsoft.com/office/drawing/2010/main">
                 <a:effectLst>
                   <a:outerShdw blurRad="63500" dist="38099" dir="2700000" algn="ctr" rotWithShape="0">
                     <a:schemeClr val="bg2">
@@ -36828,17 +36854,17 @@
           <a:effectLst/>
           <a:extLst>
             <a:ext uri="{FAA26D3D-D897-4be2-8F04-BA451C77F1D7}">
-              <ma14:placeholderFlag xmlns:ma14="http://schemas.microsoft.com/office/mac/drawingml/2011/main" xmlns="" val="1"/>
+              <ma14:placeholderFlag xmlns="" xmlns:ma14="http://schemas.microsoft.com/office/mac/drawingml/2011/main" val="1"/>
             </a:ext>
             <a:ext uri="{909E8E84-426E-40dd-AFC4-6F175D3DCCD1}">
-              <a14:hiddenFill xmlns:a14="http://schemas.microsoft.com/office/drawing/2010/main" xmlns="">
+              <a14:hiddenFill xmlns="" xmlns:a14="http://schemas.microsoft.com/office/drawing/2010/main">
                 <a:solidFill>
                   <a:schemeClr val="bg1"/>
                 </a:solidFill>
               </a14:hiddenFill>
             </a:ext>
             <a:ext uri="{91240B29-F687-4f45-9708-019B960494DF}">
-              <a14:hiddenLine xmlns:a14="http://schemas.microsoft.com/office/drawing/2010/main" xmlns="" w="12700">
+              <a14:hiddenLine xmlns="" xmlns:a14="http://schemas.microsoft.com/office/drawing/2010/main" w="12700">
                 <a:pattFill prst="narHorz">
                   <a:fgClr>
                     <a:schemeClr val="tx1"/>
@@ -36853,7 +36879,7 @@
               </a14:hiddenLine>
             </a:ext>
             <a:ext uri="{AF507438-7753-43e0-B8FC-AC1667EBCBE1}">
-              <a14:hiddenEffects xmlns:a14="http://schemas.microsoft.com/office/drawing/2010/main" xmlns="">
+              <a14:hiddenEffects xmlns="" xmlns:a14="http://schemas.microsoft.com/office/drawing/2010/main">
                 <a:effectLst>
                   <a:outerShdw blurRad="63500" dist="38099" dir="2700000" algn="ctr" rotWithShape="0">
                     <a:schemeClr val="bg2">
@@ -38858,17 +38884,17 @@
           <a:effectLst/>
           <a:extLst>
             <a:ext uri="{FAA26D3D-D897-4be2-8F04-BA451C77F1D7}">
-              <ma14:placeholderFlag xmlns:ma14="http://schemas.microsoft.com/office/mac/drawingml/2011/main" xmlns="" val="1"/>
+              <ma14:placeholderFlag xmlns="" xmlns:ma14="http://schemas.microsoft.com/office/mac/drawingml/2011/main" val="1"/>
             </a:ext>
             <a:ext uri="{909E8E84-426E-40dd-AFC4-6F175D3DCCD1}">
-              <a14:hiddenFill xmlns:a14="http://schemas.microsoft.com/office/drawing/2010/main" xmlns="">
+              <a14:hiddenFill xmlns="" xmlns:a14="http://schemas.microsoft.com/office/drawing/2010/main">
                 <a:solidFill>
                   <a:schemeClr val="bg1"/>
                 </a:solidFill>
               </a14:hiddenFill>
             </a:ext>
             <a:ext uri="{91240B29-F687-4f45-9708-019B960494DF}">
-              <a14:hiddenLine xmlns:a14="http://schemas.microsoft.com/office/drawing/2010/main" xmlns="" w="12700">
+              <a14:hiddenLine xmlns="" xmlns:a14="http://schemas.microsoft.com/office/drawing/2010/main" w="12700">
                 <a:pattFill prst="narHorz">
                   <a:fgClr>
                     <a:schemeClr val="tx1"/>
@@ -38883,7 +38909,7 @@
               </a14:hiddenLine>
             </a:ext>
             <a:ext uri="{AF507438-7753-43e0-B8FC-AC1667EBCBE1}">
-              <a14:hiddenEffects xmlns:a14="http://schemas.microsoft.com/office/drawing/2010/main" xmlns="">
+              <a14:hiddenEffects xmlns="" xmlns:a14="http://schemas.microsoft.com/office/drawing/2010/main">
                 <a:effectLst>
                   <a:outerShdw blurRad="63500" dist="38099" dir="2700000" algn="ctr" rotWithShape="0">
                     <a:schemeClr val="bg2">
@@ -39337,7 +39363,7 @@
         <a:effectLst/>
         <a:extLst>
           <a:ext uri="{AF507438-7753-43e0-B8FC-AC1667EBCBE1}">
-            <a14:hiddenEffects xmlns:a14="http://schemas.microsoft.com/office/drawing/2010/main" xmlns="">
+            <a14:hiddenEffects xmlns="" xmlns:a14="http://schemas.microsoft.com/office/drawing/2010/main">
               <a:effectLst>
                 <a:outerShdw dist="35921" dir="2700000" algn="ctr" rotWithShape="0">
                   <a:schemeClr val="bg2"/>
@@ -39410,7 +39436,7 @@
         <a:effectLst/>
         <a:extLst>
           <a:ext uri="{AF507438-7753-43e0-B8FC-AC1667EBCBE1}">
-            <a14:hiddenEffects xmlns:a14="http://schemas.microsoft.com/office/drawing/2010/main" xmlns="">
+            <a14:hiddenEffects xmlns="" xmlns:a14="http://schemas.microsoft.com/office/drawing/2010/main">
               <a:effectLst>
                 <a:outerShdw dist="35921" dir="2700000" algn="ctr" rotWithShape="0">
                   <a:schemeClr val="bg2"/>
